--- a/Misc/Resources-Notes.pptx
+++ b/Misc/Resources-Notes.pptx
@@ -8,7 +8,7 @@
     <p:notesMasterId r:id="rId4"/>
   </p:notesMasterIdLst>
   <p:handoutMasterIdLst>
-    <p:handoutMasterId r:id="rId13"/>
+    <p:handoutMasterId r:id="rId15"/>
   </p:handoutMasterIdLst>
   <p:sldIdLst>
     <p:sldId id="256" r:id="rId3"/>
@@ -16,15 +16,17 @@
     <p:sldId id="368" r:id="rId6"/>
     <p:sldId id="359" r:id="rId7"/>
     <p:sldId id="354" r:id="rId8"/>
-    <p:sldId id="364" r:id="rId9"/>
-    <p:sldId id="353" r:id="rId10"/>
-    <p:sldId id="357" r:id="rId11"/>
-    <p:sldId id="356" r:id="rId12"/>
+    <p:sldId id="375" r:id="rId9"/>
+    <p:sldId id="364" r:id="rId10"/>
+    <p:sldId id="353" r:id="rId11"/>
+    <p:sldId id="380" r:id="rId12"/>
+    <p:sldId id="357" r:id="rId13"/>
+    <p:sldId id="356" r:id="rId14"/>
   </p:sldIdLst>
   <p:sldSz cx="12192000" cy="6858000"/>
   <p:notesSz cx="6858000" cy="9144000"/>
   <p:custDataLst>
-    <p:tags r:id="rId17"/>
+    <p:tags r:id="rId19"/>
   </p:custDataLst>
   <p:defaultTextStyle>
     <a:defPPr>
@@ -3793,6 +3795,480 @@
 </p:sld>
 </file>
 
+<file path=ppt/slides/slide10.xml><?xml version="1.0" encoding="utf-8"?>
+<p:sld xmlns:a="http://schemas.openxmlformats.org/drawingml/2006/main" xmlns:r="http://schemas.openxmlformats.org/officeDocument/2006/relationships" xmlns:p="http://schemas.openxmlformats.org/presentationml/2006/main">
+  <p:cSld>
+    <p:spTree>
+      <p:nvGrpSpPr>
+        <p:cNvPr id="1" name=""/>
+        <p:cNvGrpSpPr/>
+        <p:nvPr/>
+      </p:nvGrpSpPr>
+      <p:grpSpPr/>
+      <p:sp>
+        <p:nvSpPr>
+          <p:cNvPr id="2" name="标题 1"/>
+          <p:cNvSpPr>
+            <a:spLocks noGrp="1"/>
+          </p:cNvSpPr>
+          <p:nvPr>
+            <p:ph type="title"/>
+          </p:nvPr>
+        </p:nvSpPr>
+        <p:spPr/>
+        <p:txBody>
+          <a:bodyPr/>
+          <a:p>
+            <a:r>
+              <a:rPr lang="en-US" altLang="zh-CN"/>
+              <a:t>Fonts - 3</a:t>
+            </a:r>
+            <a:endParaRPr lang="en-US" altLang="zh-CN"/>
+          </a:p>
+        </p:txBody>
+      </p:sp>
+      <p:sp>
+        <p:nvSpPr>
+          <p:cNvPr id="3" name="内容占位符 2"/>
+          <p:cNvSpPr>
+            <a:spLocks noGrp="1"/>
+          </p:cNvSpPr>
+          <p:nvPr>
+            <p:ph idx="1"/>
+          </p:nvPr>
+        </p:nvSpPr>
+        <p:spPr>
+          <a:xfrm>
+            <a:off x="838200" y="1211580"/>
+            <a:ext cx="4835525" cy="4549140"/>
+          </a:xfrm>
+        </p:spPr>
+        <p:txBody>
+          <a:bodyPr/>
+          <a:p>
+            <a:r>
+              <a:rPr lang="zh-CN" altLang="en-US"/>
+              <a:t>钉钉进步体</a:t>
+            </a:r>
+            <a:endParaRPr lang="zh-CN" altLang="en-US"/>
+          </a:p>
+          <a:p>
+            <a:pPr lvl="1"/>
+            <a:r>
+              <a:rPr lang="zh-CN" altLang="en-US"/>
+              <a:t>https://page.dingtalk.com/wow/dingtalk/default/dingtalk/y-W5aF3_ZJwzulU0nceIl</a:t>
+            </a:r>
+            <a:endParaRPr lang="zh-CN" altLang="en-US"/>
+          </a:p>
+          <a:p>
+            <a:pPr lvl="0"/>
+            <a:r>
+              <a:rPr lang="zh-CN" altLang="en-US"/>
+              <a:t>得意黑</a:t>
+            </a:r>
+            <a:endParaRPr lang="zh-CN" altLang="en-US"/>
+          </a:p>
+          <a:p>
+            <a:pPr lvl="1"/>
+            <a:r>
+              <a:rPr lang="zh-CN" altLang="en-US"/>
+              <a:t>https://github.com/atelier-anchor/smiley-sans</a:t>
+            </a:r>
+            <a:endParaRPr lang="zh-CN" altLang="en-US"/>
+          </a:p>
+          <a:p>
+            <a:pPr lvl="1"/>
+            <a:r>
+              <a:rPr lang="en-US" altLang="zh-CN"/>
+              <a:t>OFL-1.1</a:t>
+            </a:r>
+            <a:endParaRPr lang="en-US" altLang="zh-CN"/>
+          </a:p>
+          <a:p>
+            <a:pPr lvl="0"/>
+            <a:r>
+              <a:rPr lang="en-US" altLang="zh-CN" sz="2000">
+                <a:sym typeface="+mn-ea"/>
+              </a:rPr>
+              <a:t>GPL</a:t>
+            </a:r>
+            <a:endParaRPr lang="en-US" altLang="zh-CN" sz="2000"/>
+          </a:p>
+          <a:p>
+            <a:pPr lvl="1"/>
+            <a:r>
+              <a:rPr lang="zh-CN" altLang="en-US" sz="2000">
+                <a:sym typeface="+mn-ea"/>
+              </a:rPr>
+              <a:t>文泉驿</a:t>
+            </a:r>
+            <a:endParaRPr lang="zh-CN" altLang="en-US" sz="2000"/>
+          </a:p>
+          <a:p>
+            <a:pPr lvl="1"/>
+            <a:r>
+              <a:rPr lang="zh-CN" altLang="en-US" sz="2000">
+                <a:sym typeface="+mn-ea"/>
+              </a:rPr>
+              <a:t>王汉宗自由字型</a:t>
+            </a:r>
+            <a:endParaRPr lang="en-US" altLang="zh-CN"/>
+          </a:p>
+        </p:txBody>
+      </p:sp>
+      <p:pic>
+        <p:nvPicPr>
+          <p:cNvPr id="113" name="图片 112"/>
+          <p:cNvPicPr/>
+          <p:nvPr>
+            <p:custDataLst>
+              <p:tags r:id="rId1"/>
+            </p:custDataLst>
+          </p:nvPr>
+        </p:nvPicPr>
+        <p:blipFill>
+          <a:blip r:embed="rId2"/>
+          <a:stretch>
+            <a:fillRect/>
+          </a:stretch>
+        </p:blipFill>
+        <p:spPr>
+          <a:xfrm>
+            <a:off x="6922135" y="244475"/>
+            <a:ext cx="5101590" cy="5991860"/>
+          </a:xfrm>
+          <a:prstGeom prst="rect">
+            <a:avLst/>
+          </a:prstGeom>
+          <a:noFill/>
+          <a:ln w="9525">
+            <a:noFill/>
+          </a:ln>
+        </p:spPr>
+      </p:pic>
+    </p:spTree>
+    <p:custDataLst>
+      <p:tags r:id="rId3"/>
+    </p:custDataLst>
+  </p:cSld>
+  <p:clrMapOvr>
+    <a:masterClrMapping/>
+  </p:clrMapOvr>
+</p:sld>
+</file>
+
+<file path=ppt/slides/slide11.xml><?xml version="1.0" encoding="utf-8"?>
+<p:sld xmlns:a="http://schemas.openxmlformats.org/drawingml/2006/main" xmlns:r="http://schemas.openxmlformats.org/officeDocument/2006/relationships" xmlns:p="http://schemas.openxmlformats.org/presentationml/2006/main">
+  <p:cSld>
+    <p:spTree>
+      <p:nvGrpSpPr>
+        <p:cNvPr id="1" name=""/>
+        <p:cNvGrpSpPr/>
+        <p:nvPr/>
+      </p:nvGrpSpPr>
+      <p:grpSpPr/>
+      <p:sp>
+        <p:nvSpPr>
+          <p:cNvPr id="2" name="标题 1"/>
+          <p:cNvSpPr>
+            <a:spLocks noGrp="1"/>
+          </p:cNvSpPr>
+          <p:nvPr>
+            <p:ph type="title"/>
+          </p:nvPr>
+        </p:nvSpPr>
+        <p:spPr/>
+        <p:txBody>
+          <a:bodyPr/>
+          <a:p>
+            <a:r>
+              <a:rPr lang="en-US" altLang="zh-CN"/>
+              <a:t>3D Models</a:t>
+            </a:r>
+            <a:endParaRPr lang="en-US" altLang="zh-CN"/>
+          </a:p>
+        </p:txBody>
+      </p:sp>
+      <p:sp>
+        <p:nvSpPr>
+          <p:cNvPr id="3" name="内容占位符 2"/>
+          <p:cNvSpPr>
+            <a:spLocks noGrp="1"/>
+          </p:cNvSpPr>
+          <p:nvPr>
+            <p:ph idx="1"/>
+          </p:nvPr>
+        </p:nvSpPr>
+        <p:spPr>
+          <a:xfrm>
+            <a:off x="838200" y="1211580"/>
+            <a:ext cx="5325110" cy="4549140"/>
+          </a:xfrm>
+        </p:spPr>
+        <p:txBody>
+          <a:bodyPr/>
+          <a:p>
+            <a:r>
+              <a:rPr lang="en-US" altLang="zh-CN"/>
+              <a:t>Models</a:t>
+            </a:r>
+            <a:endParaRPr lang="en-US" altLang="zh-CN"/>
+          </a:p>
+          <a:p>
+            <a:pPr lvl="1"/>
+            <a:r>
+              <a:rPr lang="zh-CN" altLang="en-US"/>
+              <a:t>https://polyhaven.com/zh/models</a:t>
+            </a:r>
+            <a:endParaRPr lang="zh-CN" altLang="en-US"/>
+          </a:p>
+          <a:p>
+            <a:pPr lvl="2"/>
+            <a:r>
+              <a:rPr lang="en-US" altLang="zh-CN"/>
+              <a:t>total: 286</a:t>
+            </a:r>
+            <a:endParaRPr lang="en-US" altLang="zh-CN"/>
+          </a:p>
+        </p:txBody>
+      </p:sp>
+      <p:sp>
+        <p:nvSpPr>
+          <p:cNvPr id="4" name="内容占位符 2"/>
+          <p:cNvSpPr>
+            <a:spLocks noGrp="1"/>
+          </p:cNvSpPr>
+          <p:nvPr/>
+        </p:nvSpPr>
+        <p:spPr>
+          <a:xfrm>
+            <a:off x="6479540" y="1211580"/>
+            <a:ext cx="5325110" cy="4549140"/>
+          </a:xfrm>
+          <a:prstGeom prst="rect">
+            <a:avLst/>
+          </a:prstGeom>
+        </p:spPr>
+        <p:txBody>
+          <a:bodyPr vert="horz" lIns="91440" tIns="45720" rIns="91440" bIns="45720" rtlCol="0">
+            <a:normAutofit/>
+          </a:bodyPr>
+          <a:lstStyle>
+            <a:lvl1pPr marL="342900" indent="-342900" algn="l" defTabSz="914400" rtl="0" eaLnBrk="1" latinLnBrk="0" hangingPunct="1">
+              <a:lnSpc>
+                <a:spcPct val="90000"/>
+              </a:lnSpc>
+              <a:spcBef>
+                <a:spcPts val="1000"/>
+              </a:spcBef>
+              <a:buFont typeface="黑体" panose="02010609060101010101" pitchFamily="49" charset="-122"/>
+              <a:buChar char="〉"/>
+              <a:defRPr sz="2400" kern="1200">
+                <a:solidFill>
+                  <a:schemeClr val="tx1"/>
+                </a:solidFill>
+                <a:latin typeface="+mn-lt"/>
+                <a:ea typeface="+mn-ea"/>
+                <a:cs typeface="+mn-cs"/>
+              </a:defRPr>
+            </a:lvl1pPr>
+            <a:lvl2pPr marL="800100" indent="-342900" algn="l" defTabSz="914400" rtl="0" eaLnBrk="1" latinLnBrk="0" hangingPunct="1">
+              <a:lnSpc>
+                <a:spcPct val="90000"/>
+              </a:lnSpc>
+              <a:spcBef>
+                <a:spcPts val="500"/>
+              </a:spcBef>
+              <a:buFont typeface="Arial" panose="020B0604020202020204" pitchFamily="34" charset="0"/>
+              <a:buChar char="•"/>
+              <a:defRPr sz="2000" kern="1200">
+                <a:solidFill>
+                  <a:schemeClr val="tx1"/>
+                </a:solidFill>
+                <a:latin typeface="+mn-lt"/>
+                <a:ea typeface="+mn-ea"/>
+                <a:cs typeface="+mn-cs"/>
+              </a:defRPr>
+            </a:lvl2pPr>
+            <a:lvl3pPr marL="1257300" indent="-342900" algn="l" defTabSz="914400" rtl="0" eaLnBrk="1" latinLnBrk="0" hangingPunct="1">
+              <a:lnSpc>
+                <a:spcPct val="90000"/>
+              </a:lnSpc>
+              <a:spcBef>
+                <a:spcPts val="500"/>
+              </a:spcBef>
+              <a:buFont typeface="Arial" panose="020B0604020202020204" pitchFamily="34" charset="0"/>
+              <a:buChar char="•"/>
+              <a:defRPr sz="1800" kern="1200">
+                <a:solidFill>
+                  <a:schemeClr val="tx1"/>
+                </a:solidFill>
+                <a:latin typeface="+mn-lt"/>
+                <a:ea typeface="+mn-ea"/>
+                <a:cs typeface="+mn-cs"/>
+              </a:defRPr>
+            </a:lvl3pPr>
+            <a:lvl4pPr marL="1657350" indent="-285750" algn="l" defTabSz="914400" rtl="0" eaLnBrk="1" latinLnBrk="0" hangingPunct="1">
+              <a:lnSpc>
+                <a:spcPct val="90000"/>
+              </a:lnSpc>
+              <a:spcBef>
+                <a:spcPts val="500"/>
+              </a:spcBef>
+              <a:buFont typeface="Arial" panose="020B0604020202020204" pitchFamily="34" charset="0"/>
+              <a:buChar char="•"/>
+              <a:defRPr sz="1800" kern="1200">
+                <a:solidFill>
+                  <a:schemeClr val="tx1"/>
+                </a:solidFill>
+                <a:latin typeface="+mn-lt"/>
+                <a:ea typeface="+mn-ea"/>
+                <a:cs typeface="+mn-cs"/>
+              </a:defRPr>
+            </a:lvl4pPr>
+            <a:lvl5pPr marL="2114550" indent="-285750" algn="l" defTabSz="914400" rtl="0" eaLnBrk="1" latinLnBrk="0" hangingPunct="1">
+              <a:lnSpc>
+                <a:spcPct val="90000"/>
+              </a:lnSpc>
+              <a:spcBef>
+                <a:spcPts val="500"/>
+              </a:spcBef>
+              <a:buFont typeface="Arial" panose="020B0604020202020204" pitchFamily="34" charset="0"/>
+              <a:buChar char="•"/>
+              <a:defRPr sz="1800" kern="1200">
+                <a:solidFill>
+                  <a:schemeClr val="tx1"/>
+                </a:solidFill>
+                <a:latin typeface="+mn-lt"/>
+                <a:ea typeface="+mn-ea"/>
+                <a:cs typeface="+mn-cs"/>
+              </a:defRPr>
+            </a:lvl5pPr>
+            <a:lvl6pPr marL="2514600" indent="-228600" algn="l" defTabSz="914400" rtl="0" eaLnBrk="1" latinLnBrk="0" hangingPunct="1">
+              <a:lnSpc>
+                <a:spcPct val="90000"/>
+              </a:lnSpc>
+              <a:spcBef>
+                <a:spcPts val="500"/>
+              </a:spcBef>
+              <a:buFont typeface="Arial" panose="020B0604020202020204" pitchFamily="34" charset="0"/>
+              <a:buChar char="•"/>
+              <a:defRPr sz="1800" kern="1200">
+                <a:solidFill>
+                  <a:schemeClr val="tx1"/>
+                </a:solidFill>
+                <a:latin typeface="+mn-lt"/>
+                <a:ea typeface="+mn-ea"/>
+                <a:cs typeface="+mn-cs"/>
+              </a:defRPr>
+            </a:lvl6pPr>
+            <a:lvl7pPr marL="2971800" indent="-228600" algn="l" defTabSz="914400" rtl="0" eaLnBrk="1" latinLnBrk="0" hangingPunct="1">
+              <a:lnSpc>
+                <a:spcPct val="90000"/>
+              </a:lnSpc>
+              <a:spcBef>
+                <a:spcPts val="500"/>
+              </a:spcBef>
+              <a:buFont typeface="Arial" panose="020B0604020202020204" pitchFamily="34" charset="0"/>
+              <a:buChar char="•"/>
+              <a:defRPr sz="1800" kern="1200">
+                <a:solidFill>
+                  <a:schemeClr val="tx1"/>
+                </a:solidFill>
+                <a:latin typeface="+mn-lt"/>
+                <a:ea typeface="+mn-ea"/>
+                <a:cs typeface="+mn-cs"/>
+              </a:defRPr>
+            </a:lvl7pPr>
+            <a:lvl8pPr marL="3429000" indent="-228600" algn="l" defTabSz="914400" rtl="0" eaLnBrk="1" latinLnBrk="0" hangingPunct="1">
+              <a:lnSpc>
+                <a:spcPct val="90000"/>
+              </a:lnSpc>
+              <a:spcBef>
+                <a:spcPts val="500"/>
+              </a:spcBef>
+              <a:buFont typeface="Arial" panose="020B0604020202020204" pitchFamily="34" charset="0"/>
+              <a:buChar char="•"/>
+              <a:defRPr sz="1800" kern="1200">
+                <a:solidFill>
+                  <a:schemeClr val="tx1"/>
+                </a:solidFill>
+                <a:latin typeface="+mn-lt"/>
+                <a:ea typeface="+mn-ea"/>
+                <a:cs typeface="+mn-cs"/>
+              </a:defRPr>
+            </a:lvl8pPr>
+            <a:lvl9pPr marL="3886200" indent="-228600" algn="l" defTabSz="914400" rtl="0" eaLnBrk="1" latinLnBrk="0" hangingPunct="1">
+              <a:lnSpc>
+                <a:spcPct val="90000"/>
+              </a:lnSpc>
+              <a:spcBef>
+                <a:spcPts val="500"/>
+              </a:spcBef>
+              <a:buFont typeface="Arial" panose="020B0604020202020204" pitchFamily="34" charset="0"/>
+              <a:buChar char="•"/>
+              <a:defRPr sz="1800" kern="1200">
+                <a:solidFill>
+                  <a:schemeClr val="tx1"/>
+                </a:solidFill>
+                <a:latin typeface="+mn-lt"/>
+                <a:ea typeface="+mn-ea"/>
+                <a:cs typeface="+mn-cs"/>
+              </a:defRPr>
+            </a:lvl9pPr>
+          </a:lstStyle>
+          <a:p>
+            <a:r>
+              <a:rPr lang="en-US" altLang="zh-CN"/>
+              <a:t>Textures</a:t>
+            </a:r>
+            <a:endParaRPr lang="en-US" altLang="zh-CN"/>
+          </a:p>
+          <a:p>
+            <a:pPr lvl="1"/>
+            <a:r>
+              <a:rPr lang="zh-CN" altLang="en-US"/>
+              <a:t>https://polyhaven.com/zh/textures</a:t>
+            </a:r>
+            <a:endParaRPr lang="zh-CN" altLang="en-US"/>
+          </a:p>
+          <a:p>
+            <a:pPr lvl="2"/>
+            <a:r>
+              <a:rPr lang="en-US" altLang="zh-CN"/>
+              <a:t>total: 432</a:t>
+            </a:r>
+            <a:endParaRPr lang="en-US" altLang="zh-CN"/>
+          </a:p>
+          <a:p>
+            <a:pPr lvl="1"/>
+            <a:r>
+              <a:rPr lang="en-US" altLang="zh-CN"/>
+              <a:t>https://cc0-textures.com/</a:t>
+            </a:r>
+            <a:endParaRPr lang="en-US" altLang="zh-CN"/>
+          </a:p>
+          <a:p>
+            <a:pPr lvl="2"/>
+            <a:r>
+              <a:rPr lang="en-US" altLang="zh-CN"/>
+              <a:t>total: 3314</a:t>
+            </a:r>
+            <a:endParaRPr lang="en-US" altLang="zh-CN"/>
+          </a:p>
+        </p:txBody>
+      </p:sp>
+    </p:spTree>
+    <p:custDataLst>
+      <p:tags r:id="rId1"/>
+    </p:custDataLst>
+  </p:cSld>
+  <p:clrMapOvr>
+    <a:masterClrMapping/>
+  </p:clrMapOvr>
+</p:sld>
+</file>
+
 <file path=ppt/slides/slide2.xml><?xml version="1.0" encoding="utf-8"?>
 <p:sld xmlns:a="http://schemas.openxmlformats.org/drawingml/2006/main" xmlns:r="http://schemas.openxmlformats.org/officeDocument/2006/relationships" xmlns:p="http://schemas.openxmlformats.org/presentationml/2006/main">
   <p:cSld>
@@ -4242,6 +4718,22 @@
             </a:r>
             <a:endParaRPr lang="en-US" altLang="zh-CN"/>
           </a:p>
+          <a:p>
+            <a:pPr lvl="1"/>
+            <a:r>
+              <a:rPr lang="en-US" altLang="zh-CN"/>
+              <a:t>https://www.vecteezy.com</a:t>
+            </a:r>
+            <a:endParaRPr lang="en-US" altLang="zh-CN"/>
+          </a:p>
+          <a:p>
+            <a:pPr lvl="2"/>
+            <a:r>
+              <a:rPr lang="en-US" altLang="zh-CN"/>
+              <a:t>attribution: &lt;a href="https://www.vecteezy.com/free-photos/360"&gt;360 Stock photos by Vecteezy&lt;/a&gt;</a:t>
+            </a:r>
+            <a:endParaRPr lang="en-US" altLang="zh-CN"/>
+          </a:p>
         </p:txBody>
       </p:sp>
     </p:spTree>
@@ -4281,7 +4773,7 @@
           <a:p>
             <a:r>
               <a:rPr lang="en-US" altLang="zh-CN"/>
-              <a:t>Music</a:t>
+              <a:t>Icons</a:t>
             </a:r>
             <a:endParaRPr lang="en-US" altLang="zh-CN"/>
           </a:p>
@@ -4303,7 +4795,7 @@
           <a:p>
             <a:r>
               <a:rPr lang="zh-CN" altLang="en-US"/>
-              <a:t>https://musopen.org/</a:t>
+              <a:t>https://fonts.google.com/icons</a:t>
             </a:r>
             <a:endParaRPr lang="zh-CN" altLang="en-US"/>
           </a:p>
@@ -4311,41 +4803,59 @@
             <a:pPr lvl="1"/>
             <a:r>
               <a:rPr lang="en-US" altLang="zh-CN"/>
-              <a:t>all royalty free</a:t>
+              <a:t>license: apache</a:t>
             </a:r>
             <a:endParaRPr lang="en-US" altLang="zh-CN"/>
           </a:p>
           <a:p>
             <a:pPr lvl="1"/>
             <a:r>
-              <a:rPr lang="en-US" altLang="zh-CN"/>
-              <a:t>search by composer, instrument, period</a:t>
-            </a:r>
-            <a:endParaRPr lang="en-US" altLang="zh-CN"/>
+              <a:rPr lang="zh-CN" altLang="en-US"/>
+              <a:t>https://github.com/google/material-design-icons.git</a:t>
+            </a:r>
+            <a:endParaRPr lang="zh-CN" altLang="en-US"/>
+          </a:p>
+          <a:p>
+            <a:r>
+              <a:rPr lang="zh-CN" altLang="en-US"/>
+              <a:t>https://www.iconfinder.com/</a:t>
+            </a:r>
+            <a:endParaRPr lang="zh-CN" altLang="en-US"/>
+          </a:p>
+          <a:p>
+            <a:pPr lvl="1"/>
+            <a:r>
+              <a:rPr lang="en-US" altLang="zh-CN" sz="2000"/>
+              <a:t>fast access</a:t>
+            </a:r>
+            <a:endParaRPr lang="en-US" altLang="zh-CN" sz="2000"/>
+          </a:p>
+          <a:p>
+            <a:pPr lvl="1"/>
+            <a:r>
+              <a:rPr lang="en-US" altLang="zh-CN" sz="2000"/>
+              <a:t>free, commercial use</a:t>
+            </a:r>
+            <a:endParaRPr lang="en-US" altLang="zh-CN" sz="2000"/>
           </a:p>
           <a:p>
             <a:pPr lvl="0"/>
             <a:r>
-              <a:rPr lang="en-US" altLang="zh-CN"/>
-              <a:t>https://freesfx.co.uk/</a:t>
-            </a:r>
-            <a:endParaRPr lang="en-US" altLang="zh-CN"/>
+              <a:rPr lang="zh-CN" altLang="en-US"/>
+              <a:t>https://www.flaticon.com/</a:t>
+            </a:r>
+            <a:endParaRPr lang="en-US" altLang="zh-CN" sz="2400"/>
           </a:p>
           <a:p>
             <a:pPr lvl="1"/>
             <a:r>
-              <a:rPr lang="en-US" altLang="zh-CN"/>
-              <a:t>Slow to download</a:t>
-            </a:r>
-            <a:endParaRPr lang="en-US" altLang="zh-CN"/>
-          </a:p>
-          <a:p>
-            <a:pPr lvl="1"/>
-            <a:r>
-              <a:rPr lang="en-US" altLang="zh-CN"/>
-              <a:t>sound effects, music</a:t>
-            </a:r>
-            <a:endParaRPr lang="en-US" altLang="zh-CN"/>
+              <a:rPr lang="en-US" altLang="zh-CN" sz="2000"/>
+              <a:t>slow access</a:t>
+            </a:r>
+            <a:endParaRPr lang="zh-CN" altLang="en-US"/>
+          </a:p>
+          <a:p>
+            <a:endParaRPr lang="zh-CN" altLang="en-US"/>
           </a:p>
         </p:txBody>
       </p:sp>
@@ -4386,6 +4896,111 @@
           <a:p>
             <a:r>
               <a:rPr lang="en-US" altLang="zh-CN"/>
+              <a:t>Music</a:t>
+            </a:r>
+            <a:endParaRPr lang="en-US" altLang="zh-CN"/>
+          </a:p>
+        </p:txBody>
+      </p:sp>
+      <p:sp>
+        <p:nvSpPr>
+          <p:cNvPr id="3" name="内容占位符 2"/>
+          <p:cNvSpPr>
+            <a:spLocks noGrp="1"/>
+          </p:cNvSpPr>
+          <p:nvPr>
+            <p:ph idx="1"/>
+          </p:nvPr>
+        </p:nvSpPr>
+        <p:spPr/>
+        <p:txBody>
+          <a:bodyPr/>
+          <a:p>
+            <a:r>
+              <a:rPr lang="zh-CN" altLang="en-US"/>
+              <a:t>https://musopen.org/</a:t>
+            </a:r>
+            <a:endParaRPr lang="zh-CN" altLang="en-US"/>
+          </a:p>
+          <a:p>
+            <a:pPr lvl="1"/>
+            <a:r>
+              <a:rPr lang="en-US" altLang="zh-CN"/>
+              <a:t>all royalty free</a:t>
+            </a:r>
+            <a:endParaRPr lang="en-US" altLang="zh-CN"/>
+          </a:p>
+          <a:p>
+            <a:pPr lvl="1"/>
+            <a:r>
+              <a:rPr lang="en-US" altLang="zh-CN"/>
+              <a:t>search by composer, instrument, period</a:t>
+            </a:r>
+            <a:endParaRPr lang="en-US" altLang="zh-CN"/>
+          </a:p>
+          <a:p>
+            <a:pPr lvl="0"/>
+            <a:r>
+              <a:rPr lang="en-US" altLang="zh-CN"/>
+              <a:t>https://freesfx.co.uk/</a:t>
+            </a:r>
+            <a:endParaRPr lang="en-US" altLang="zh-CN"/>
+          </a:p>
+          <a:p>
+            <a:pPr lvl="1"/>
+            <a:r>
+              <a:rPr lang="en-US" altLang="zh-CN"/>
+              <a:t>Slow to download</a:t>
+            </a:r>
+            <a:endParaRPr lang="en-US" altLang="zh-CN"/>
+          </a:p>
+          <a:p>
+            <a:pPr lvl="1"/>
+            <a:r>
+              <a:rPr lang="en-US" altLang="zh-CN"/>
+              <a:t>sound effects, music</a:t>
+            </a:r>
+            <a:endParaRPr lang="en-US" altLang="zh-CN"/>
+          </a:p>
+        </p:txBody>
+      </p:sp>
+    </p:spTree>
+    <p:custDataLst>
+      <p:tags r:id="rId1"/>
+    </p:custDataLst>
+  </p:cSld>
+  <p:clrMapOvr>
+    <a:masterClrMapping/>
+  </p:clrMapOvr>
+</p:sld>
+</file>
+
+<file path=ppt/slides/slide8.xml><?xml version="1.0" encoding="utf-8"?>
+<p:sld xmlns:a="http://schemas.openxmlformats.org/drawingml/2006/main" xmlns:r="http://schemas.openxmlformats.org/officeDocument/2006/relationships" xmlns:p="http://schemas.openxmlformats.org/presentationml/2006/main">
+  <p:cSld>
+    <p:spTree>
+      <p:nvGrpSpPr>
+        <p:cNvPr id="1" name=""/>
+        <p:cNvGrpSpPr/>
+        <p:nvPr/>
+      </p:nvGrpSpPr>
+      <p:grpSpPr/>
+      <p:sp>
+        <p:nvSpPr>
+          <p:cNvPr id="2" name="标题 1"/>
+          <p:cNvSpPr>
+            <a:spLocks noGrp="1"/>
+          </p:cNvSpPr>
+          <p:nvPr>
+            <p:ph type="title"/>
+          </p:nvPr>
+        </p:nvSpPr>
+        <p:spPr/>
+        <p:txBody>
+          <a:bodyPr/>
+          <a:p>
+            <a:r>
+              <a:rPr lang="en-US" altLang="zh-CN"/>
               <a:t>Fonts</a:t>
             </a:r>
             <a:endParaRPr lang="en-US" altLang="zh-CN"/>
@@ -4405,7 +5020,7 @@
         <p:spPr>
           <a:xfrm>
             <a:off x="838200" y="1211580"/>
-            <a:ext cx="6214745" cy="5209540"/>
+            <a:ext cx="6214745" cy="5234305"/>
           </a:xfrm>
         </p:spPr>
         <p:txBody>
@@ -4501,62 +5116,64 @@
           <a:p>
             <a:pPr lvl="1"/>
             <a:r>
+              <a:rPr lang="zh-CN" altLang="en-US" sz="2000">
+                <a:sym typeface="+mn-ea"/>
+              </a:rPr>
+              <a:t>站酷系列字体</a:t>
+            </a:r>
+            <a:endParaRPr lang="zh-CN" altLang="en-US" sz="2000"/>
+          </a:p>
+          <a:p>
+            <a:pPr lvl="2"/>
+            <a:r>
+              <a:rPr lang="zh-CN" altLang="en-US" sz="2000">
+                <a:sym typeface="+mn-ea"/>
+              </a:rPr>
+              <a:t>https://www.zcool.com.cn/special/zcoolfonts/</a:t>
+            </a:r>
+            <a:endParaRPr lang="zh-CN" altLang="en-US" sz="2000">
+              <a:sym typeface="+mn-ea"/>
+            </a:endParaRPr>
+          </a:p>
+          <a:p>
+            <a:pPr lvl="1"/>
+            <a:r>
               <a:rPr lang="zh-CN" altLang="en-US"/>
-              <a:t>站酷系列字体</a:t>
-            </a:r>
-            <a:endParaRPr lang="zh-CN" altLang="en-US"/>
+              <a:t>华为鸿蒙HarmonyOS Sans字体</a:t>
+            </a:r>
+            <a:endParaRPr lang="zh-CN" altLang="en-US"/>
+          </a:p>
+          <a:p>
+            <a:pPr lvl="1"/>
+            <a:r>
+              <a:rPr lang="zh-CN" altLang="en-US"/>
+              <a:t>斗鱼追光体</a:t>
+            </a:r>
+            <a:endParaRPr lang="zh-CN" altLang="en-US"/>
+          </a:p>
+          <a:p>
+            <a:pPr lvl="1"/>
+            <a:r>
+              <a:rPr lang="en-US" altLang="zh-CN"/>
+              <a:t>https://github.com/refinec/PingFangSC</a:t>
+            </a:r>
+            <a:endParaRPr lang="en-US" altLang="zh-CN"/>
           </a:p>
           <a:p>
             <a:pPr lvl="2"/>
             <a:r>
               <a:rPr lang="zh-CN" altLang="en-US"/>
-              <a:t>https://www.zcool.com.cn/special/zcoolfonts/</a:t>
-            </a:r>
-            <a:endParaRPr lang="zh-CN" altLang="en-US"/>
-          </a:p>
-          <a:p>
-            <a:pPr lvl="1"/>
-            <a:r>
-              <a:rPr lang="zh-CN" altLang="en-US" sz="2000"/>
-              <a:t>方正字库</a:t>
-            </a:r>
-            <a:endParaRPr lang="zh-CN" altLang="en-US" sz="2000"/>
+              <a:t>苹方字体</a:t>
+            </a:r>
+            <a:endParaRPr lang="zh-CN" altLang="en-US"/>
           </a:p>
           <a:p>
             <a:pPr lvl="2"/>
             <a:r>
-              <a:rPr lang="zh-CN" altLang="en-US"/>
-              <a:t>https://www.foundertype.com/index.php/About/powerbus.html</a:t>
-            </a:r>
-            <a:endParaRPr lang="zh-CN" altLang="en-US"/>
-          </a:p>
-          <a:p>
-            <a:pPr lvl="2"/>
-            <a:r>
-              <a:rPr lang="zh-CN" altLang="en-US"/>
-              <a:t>免费字体：包括五种字体：方正黑体、方正书宋、方正仿宋、方正楷体、 方正甲骨文。针对“商业发布”这种使用方式免费。</a:t>
-            </a:r>
-            <a:endParaRPr lang="zh-CN" altLang="en-US"/>
-          </a:p>
-          <a:p>
-            <a:pPr lvl="0"/>
-            <a:r>
-              <a:rPr lang="en-US" altLang="zh-CN" sz="2400"/>
-              <a:t>GPL</a:t>
-            </a:r>
-            <a:endParaRPr lang="en-US" altLang="zh-CN" sz="2400"/>
-          </a:p>
-          <a:p>
-            <a:pPr lvl="1"/>
-            <a:r>
-              <a:rPr lang="zh-CN" altLang="en-US"/>
-              <a:t>文泉驿</a:t>
-            </a:r>
-            <a:endParaRPr lang="zh-CN" altLang="en-US"/>
-          </a:p>
-          <a:p>
-            <a:pPr lvl="1"/>
-            <a:endParaRPr lang="zh-CN" altLang="en-US"/>
+              <a:rPr lang="en-US" altLang="zh-CN"/>
+              <a:t>MIT</a:t>
+            </a:r>
+            <a:endParaRPr lang="en-US" altLang="zh-CN"/>
           </a:p>
         </p:txBody>
       </p:sp>
@@ -4768,141 +5385,57 @@
           </a:ln>
         </p:spPr>
       </p:pic>
-    </p:spTree>
-    <p:custDataLst>
-      <p:tags r:id="rId9"/>
-    </p:custDataLst>
-  </p:cSld>
-  <p:clrMapOvr>
-    <a:masterClrMapping/>
-  </p:clrMapOvr>
-</p:sld>
-</file>
-
-<file path=ppt/slides/slide8.xml><?xml version="1.0" encoding="utf-8"?>
-<p:sld xmlns:a="http://schemas.openxmlformats.org/drawingml/2006/main" xmlns:r="http://schemas.openxmlformats.org/officeDocument/2006/relationships" xmlns:p="http://schemas.openxmlformats.org/presentationml/2006/main">
-  <p:cSld>
-    <p:spTree>
-      <p:nvGrpSpPr>
-        <p:cNvPr id="1" name=""/>
-        <p:cNvGrpSpPr/>
-        <p:nvPr/>
-      </p:nvGrpSpPr>
-      <p:grpSpPr/>
-      <p:sp>
-        <p:nvSpPr>
-          <p:cNvPr id="2" name="标题 1"/>
-          <p:cNvSpPr>
-            <a:spLocks noGrp="1"/>
-          </p:cNvSpPr>
-          <p:nvPr>
-            <p:ph type="title"/>
-          </p:nvPr>
-        </p:nvSpPr>
-        <p:spPr/>
-        <p:txBody>
-          <a:bodyPr/>
-          <a:p>
-            <a:r>
-              <a:rPr lang="en-US" altLang="zh-CN"/>
-              <a:t>Fonts - 2</a:t>
-            </a:r>
-            <a:endParaRPr lang="en-US" altLang="zh-CN"/>
-          </a:p>
-        </p:txBody>
-      </p:sp>
-      <p:sp>
-        <p:nvSpPr>
-          <p:cNvPr id="3" name="内容占位符 2"/>
-          <p:cNvSpPr>
-            <a:spLocks noGrp="1"/>
-          </p:cNvSpPr>
-          <p:nvPr>
-            <p:ph idx="1"/>
-          </p:nvPr>
-        </p:nvSpPr>
-        <p:spPr>
-          <a:xfrm>
-            <a:off x="838200" y="1211580"/>
-            <a:ext cx="4835525" cy="4549140"/>
-          </a:xfrm>
-        </p:spPr>
-        <p:txBody>
-          <a:bodyPr/>
-          <a:p>
-            <a:r>
-              <a:rPr lang="zh-CN" altLang="en-US"/>
-              <a:t>钉钉进步体</a:t>
-            </a:r>
-            <a:endParaRPr lang="zh-CN" altLang="en-US"/>
-          </a:p>
-          <a:p>
-            <a:pPr lvl="1"/>
-            <a:r>
-              <a:rPr lang="zh-CN" altLang="en-US"/>
-              <a:t>https://page.dingtalk.com/wow/dingtalk/default/dingtalk/y-W5aF3_ZJwzulU0nceIl</a:t>
-            </a:r>
-            <a:endParaRPr lang="zh-CN" altLang="en-US"/>
-          </a:p>
-          <a:p>
-            <a:pPr lvl="0"/>
-            <a:r>
-              <a:rPr lang="zh-CN" altLang="en-US"/>
-              <a:t>得意黑</a:t>
-            </a:r>
-            <a:endParaRPr lang="zh-CN" altLang="en-US"/>
-          </a:p>
-          <a:p>
-            <a:pPr lvl="1"/>
-            <a:r>
-              <a:rPr lang="zh-CN" altLang="en-US"/>
-              <a:t>https://github.com/atelier-anchor/smiley-sans</a:t>
-            </a:r>
-            <a:endParaRPr lang="zh-CN" altLang="en-US"/>
-          </a:p>
-          <a:p>
-            <a:pPr lvl="1"/>
-            <a:r>
-              <a:rPr lang="en-US" altLang="zh-CN"/>
-              <a:t>OFL-1.1</a:t>
-            </a:r>
-            <a:endParaRPr lang="en-US" altLang="zh-CN"/>
-          </a:p>
-        </p:txBody>
-      </p:sp>
       <p:pic>
         <p:nvPicPr>
-          <p:cNvPr id="113" name="图片 112"/>
-          <p:cNvPicPr/>
-          <p:nvPr>
-            <p:custDataLst>
-              <p:tags r:id="rId1"/>
-            </p:custDataLst>
-          </p:nvPr>
+          <p:cNvPr id="4" name="图片 3" descr="SourceHanSerifSC-VF"/>
+          <p:cNvPicPr>
+            <a:picLocks noChangeAspect="1"/>
+          </p:cNvPicPr>
+          <p:nvPr/>
         </p:nvPicPr>
         <p:blipFill>
-          <a:blip r:embed="rId2"/>
+          <a:blip r:embed="rId9"/>
           <a:stretch>
             <a:fillRect/>
           </a:stretch>
         </p:blipFill>
         <p:spPr>
           <a:xfrm>
-            <a:off x="6922135" y="244475"/>
-            <a:ext cx="5101590" cy="5991860"/>
+            <a:off x="7616190" y="661670"/>
+            <a:ext cx="923925" cy="342900"/>
           </a:xfrm>
           <a:prstGeom prst="rect">
             <a:avLst/>
           </a:prstGeom>
-          <a:noFill/>
-          <a:ln w="9525">
-            <a:noFill/>
-          </a:ln>
+        </p:spPr>
+      </p:pic>
+      <p:pic>
+        <p:nvPicPr>
+          <p:cNvPr id="5" name="图片 4" descr="SourceHanSansSC-VF"/>
+          <p:cNvPicPr>
+            <a:picLocks noChangeAspect="1"/>
+          </p:cNvPicPr>
+          <p:nvPr/>
+        </p:nvPicPr>
+        <p:blipFill>
+          <a:blip r:embed="rId10"/>
+          <a:stretch>
+            <a:fillRect/>
+          </a:stretch>
+        </p:blipFill>
+        <p:spPr>
+          <a:xfrm>
+            <a:off x="7933690" y="1007745"/>
+            <a:ext cx="923925" cy="285750"/>
+          </a:xfrm>
+          <a:prstGeom prst="rect">
+            <a:avLst/>
+          </a:prstGeom>
         </p:spPr>
       </p:pic>
     </p:spTree>
     <p:custDataLst>
-      <p:tags r:id="rId3"/>
+      <p:tags r:id="rId11"/>
     </p:custDataLst>
   </p:cSld>
   <p:clrMapOvr>
@@ -4937,7 +5470,7 @@
           <a:p>
             <a:r>
               <a:rPr lang="en-US" altLang="zh-CN"/>
-              <a:t>3D Models</a:t>
+              <a:t>Fonts - 2</a:t>
             </a:r>
             <a:endParaRPr lang="en-US" altLang="zh-CN"/>
           </a:p>
@@ -4956,265 +5489,257 @@
         <p:spPr>
           <a:xfrm>
             <a:off x="838200" y="1211580"/>
-            <a:ext cx="5325110" cy="4549140"/>
+            <a:ext cx="5708015" cy="4549140"/>
           </a:xfrm>
         </p:spPr>
         <p:txBody>
           <a:bodyPr/>
           <a:p>
             <a:r>
-              <a:rPr lang="en-US" altLang="zh-CN"/>
-              <a:t>Models</a:t>
-            </a:r>
-            <a:endParaRPr lang="en-US" altLang="zh-CN"/>
+              <a:rPr lang="zh-CN" altLang="en-US"/>
+              <a:t>免费可商用</a:t>
+            </a:r>
+            <a:endParaRPr lang="zh-CN" altLang="en-US"/>
           </a:p>
           <a:p>
             <a:pPr lvl="1"/>
             <a:r>
-              <a:rPr lang="zh-CN" altLang="en-US"/>
-              <a:t>https://polyhaven.com/zh/models</a:t>
-            </a:r>
-            <a:endParaRPr lang="zh-CN" altLang="en-US"/>
+              <a:rPr lang="zh-CN" altLang="en-US" sz="2000">
+                <a:sym typeface="+mn-ea"/>
+              </a:rPr>
+              <a:t>阿里巴巴普惠体</a:t>
+            </a:r>
+            <a:r>
+              <a:rPr lang="en-US" altLang="zh-CN" sz="2000">
+                <a:sym typeface="+mn-ea"/>
+              </a:rPr>
+              <a:t>2.0</a:t>
+            </a:r>
+            <a:endParaRPr lang="zh-CN" altLang="en-US" sz="2000"/>
           </a:p>
           <a:p>
             <a:pPr lvl="2"/>
             <a:r>
-              <a:rPr lang="en-US" altLang="zh-CN"/>
-              <a:t>total: 286</a:t>
-            </a:r>
-            <a:endParaRPr lang="en-US" altLang="zh-CN"/>
-          </a:p>
-        </p:txBody>
-      </p:sp>
-      <p:sp>
-        <p:nvSpPr>
-          <p:cNvPr id="4" name="内容占位符 2"/>
-          <p:cNvSpPr>
-            <a:spLocks noGrp="1"/>
-          </p:cNvSpPr>
+              <a:rPr lang="zh-CN" altLang="en-US">
+                <a:sym typeface="+mn-ea"/>
+              </a:rPr>
+              <a:t>https://www.alibabafonts.com/#/home</a:t>
+            </a:r>
+            <a:endParaRPr lang="zh-CN" altLang="en-US"/>
+          </a:p>
+          <a:p>
+            <a:pPr lvl="2"/>
+            <a:r>
+              <a:rPr lang="en-US" altLang="zh-CN">
+                <a:sym typeface="+mn-ea"/>
+              </a:rPr>
+              <a:t>GB18030-2022</a:t>
+            </a:r>
+            <a:endParaRPr lang="en-US" altLang="zh-CN">
+              <a:sym typeface="+mn-ea"/>
+            </a:endParaRPr>
+          </a:p>
+          <a:p>
+            <a:pPr lvl="2"/>
+            <a:r>
+              <a:rPr lang="en-US" altLang="zh-CN">
+                <a:sym typeface="+mn-ea"/>
+              </a:rPr>
+              <a:t>9</a:t>
+            </a:r>
+            <a:r>
+              <a:rPr lang="zh-CN" altLang="en-US">
+                <a:sym typeface="+mn-ea"/>
+              </a:rPr>
+              <a:t>个</a:t>
+            </a:r>
+            <a:r>
+              <a:rPr lang="en-US" altLang="zh-CN">
+                <a:sym typeface="+mn-ea"/>
+              </a:rPr>
+              <a:t>fontweight</a:t>
+            </a:r>
+            <a:endParaRPr lang="en-US" altLang="zh-CN">
+              <a:sym typeface="+mn-ea"/>
+            </a:endParaRPr>
+          </a:p>
+          <a:p>
+            <a:pPr lvl="1"/>
+            <a:r>
+              <a:rPr lang="zh-CN" altLang="en-US">
+                <a:sym typeface="+mn-ea"/>
+              </a:rPr>
+              <a:t>阿里巴巴普惠体</a:t>
+            </a:r>
+            <a:r>
+              <a:rPr lang="en-US" altLang="zh-CN">
+                <a:sym typeface="+mn-ea"/>
+              </a:rPr>
+              <a:t>3.0</a:t>
+            </a:r>
+            <a:endParaRPr lang="en-US" altLang="zh-CN">
+              <a:sym typeface="+mn-ea"/>
+            </a:endParaRPr>
+          </a:p>
+          <a:p>
+            <a:pPr lvl="1"/>
+            <a:r>
+              <a:rPr lang="zh-CN" altLang="en-US">
+                <a:sym typeface="+mn-ea"/>
+              </a:rPr>
+              <a:t>方正字库</a:t>
+            </a:r>
+            <a:endParaRPr lang="zh-CN" altLang="en-US"/>
+          </a:p>
+          <a:p>
+            <a:pPr lvl="2"/>
+            <a:r>
+              <a:rPr lang="zh-CN" altLang="en-US">
+                <a:sym typeface="+mn-ea"/>
+              </a:rPr>
+              <a:t>https://www.foundertype.com/index.php/About/powerbus.html</a:t>
+            </a:r>
+            <a:endParaRPr lang="zh-CN" altLang="en-US"/>
+          </a:p>
+          <a:p>
+            <a:pPr lvl="2"/>
+            <a:r>
+              <a:rPr lang="zh-CN" altLang="en-US">
+                <a:sym typeface="+mn-ea"/>
+              </a:rPr>
+              <a:t>免费字体：包括五种字体：方正黑体、方正书宋、方正仿宋、方正楷体、 方正甲骨文。针对“商业发布”这种使用方式免费。</a:t>
+            </a:r>
+            <a:endParaRPr lang="zh-CN" altLang="en-US"/>
+          </a:p>
+          <a:p>
+            <a:pPr lvl="2"/>
+            <a:endParaRPr lang="zh-CN" altLang="en-US"/>
+          </a:p>
+        </p:txBody>
+      </p:sp>
+      <p:pic>
+        <p:nvPicPr>
+          <p:cNvPr id="5" name="图片 4"/>
+          <p:cNvPicPr>
+            <a:picLocks noChangeAspect="1"/>
+          </p:cNvPicPr>
           <p:nvPr/>
-        </p:nvSpPr>
+        </p:nvPicPr>
+        <p:blipFill>
+          <a:blip r:embed="rId1"/>
+          <a:stretch>
+            <a:fillRect/>
+          </a:stretch>
+        </p:blipFill>
         <p:spPr>
           <a:xfrm>
-            <a:off x="6479540" y="1211580"/>
-            <a:ext cx="5325110" cy="4549140"/>
+            <a:off x="8232775" y="734695"/>
+            <a:ext cx="3600450" cy="3205480"/>
           </a:xfrm>
           <a:prstGeom prst="rect">
             <a:avLst/>
           </a:prstGeom>
         </p:spPr>
-        <p:txBody>
-          <a:bodyPr vert="horz" lIns="91440" tIns="45720" rIns="91440" bIns="45720" rtlCol="0">
-            <a:normAutofit/>
-          </a:bodyPr>
-          <a:lstStyle>
-            <a:lvl1pPr marL="342900" indent="-342900" algn="l" defTabSz="914400" rtl="0" eaLnBrk="1" latinLnBrk="0" hangingPunct="1">
-              <a:lnSpc>
-                <a:spcPct val="90000"/>
-              </a:lnSpc>
-              <a:spcBef>
-                <a:spcPts val="1000"/>
-              </a:spcBef>
-              <a:buFont typeface="黑体" panose="02010609060101010101" pitchFamily="49" charset="-122"/>
-              <a:buChar char="〉"/>
-              <a:defRPr sz="2400" kern="1200">
-                <a:solidFill>
-                  <a:schemeClr val="tx1"/>
-                </a:solidFill>
-                <a:latin typeface="+mn-lt"/>
-                <a:ea typeface="+mn-ea"/>
-                <a:cs typeface="+mn-cs"/>
-              </a:defRPr>
-            </a:lvl1pPr>
-            <a:lvl2pPr marL="800100" indent="-342900" algn="l" defTabSz="914400" rtl="0" eaLnBrk="1" latinLnBrk="0" hangingPunct="1">
-              <a:lnSpc>
-                <a:spcPct val="90000"/>
-              </a:lnSpc>
-              <a:spcBef>
-                <a:spcPts val="500"/>
-              </a:spcBef>
-              <a:buFont typeface="Arial" panose="020B0604020202020204" pitchFamily="34" charset="0"/>
-              <a:buChar char="•"/>
-              <a:defRPr sz="2000" kern="1200">
-                <a:solidFill>
-                  <a:schemeClr val="tx1"/>
-                </a:solidFill>
-                <a:latin typeface="+mn-lt"/>
-                <a:ea typeface="+mn-ea"/>
-                <a:cs typeface="+mn-cs"/>
-              </a:defRPr>
-            </a:lvl2pPr>
-            <a:lvl3pPr marL="1257300" indent="-342900" algn="l" defTabSz="914400" rtl="0" eaLnBrk="1" latinLnBrk="0" hangingPunct="1">
-              <a:lnSpc>
-                <a:spcPct val="90000"/>
-              </a:lnSpc>
-              <a:spcBef>
-                <a:spcPts val="500"/>
-              </a:spcBef>
-              <a:buFont typeface="Arial" panose="020B0604020202020204" pitchFamily="34" charset="0"/>
-              <a:buChar char="•"/>
-              <a:defRPr sz="1800" kern="1200">
-                <a:solidFill>
-                  <a:schemeClr val="tx1"/>
-                </a:solidFill>
-                <a:latin typeface="+mn-lt"/>
-                <a:ea typeface="+mn-ea"/>
-                <a:cs typeface="+mn-cs"/>
-              </a:defRPr>
-            </a:lvl3pPr>
-            <a:lvl4pPr marL="1657350" indent="-285750" algn="l" defTabSz="914400" rtl="0" eaLnBrk="1" latinLnBrk="0" hangingPunct="1">
-              <a:lnSpc>
-                <a:spcPct val="90000"/>
-              </a:lnSpc>
-              <a:spcBef>
-                <a:spcPts val="500"/>
-              </a:spcBef>
-              <a:buFont typeface="Arial" panose="020B0604020202020204" pitchFamily="34" charset="0"/>
-              <a:buChar char="•"/>
-              <a:defRPr sz="1800" kern="1200">
-                <a:solidFill>
-                  <a:schemeClr val="tx1"/>
-                </a:solidFill>
-                <a:latin typeface="+mn-lt"/>
-                <a:ea typeface="+mn-ea"/>
-                <a:cs typeface="+mn-cs"/>
-              </a:defRPr>
-            </a:lvl4pPr>
-            <a:lvl5pPr marL="2114550" indent="-285750" algn="l" defTabSz="914400" rtl="0" eaLnBrk="1" latinLnBrk="0" hangingPunct="1">
-              <a:lnSpc>
-                <a:spcPct val="90000"/>
-              </a:lnSpc>
-              <a:spcBef>
-                <a:spcPts val="500"/>
-              </a:spcBef>
-              <a:buFont typeface="Arial" panose="020B0604020202020204" pitchFamily="34" charset="0"/>
-              <a:buChar char="•"/>
-              <a:defRPr sz="1800" kern="1200">
-                <a:solidFill>
-                  <a:schemeClr val="tx1"/>
-                </a:solidFill>
-                <a:latin typeface="+mn-lt"/>
-                <a:ea typeface="+mn-ea"/>
-                <a:cs typeface="+mn-cs"/>
-              </a:defRPr>
-            </a:lvl5pPr>
-            <a:lvl6pPr marL="2514600" indent="-228600" algn="l" defTabSz="914400" rtl="0" eaLnBrk="1" latinLnBrk="0" hangingPunct="1">
-              <a:lnSpc>
-                <a:spcPct val="90000"/>
-              </a:lnSpc>
-              <a:spcBef>
-                <a:spcPts val="500"/>
-              </a:spcBef>
-              <a:buFont typeface="Arial" panose="020B0604020202020204" pitchFamily="34" charset="0"/>
-              <a:buChar char="•"/>
-              <a:defRPr sz="1800" kern="1200">
-                <a:solidFill>
-                  <a:schemeClr val="tx1"/>
-                </a:solidFill>
-                <a:latin typeface="+mn-lt"/>
-                <a:ea typeface="+mn-ea"/>
-                <a:cs typeface="+mn-cs"/>
-              </a:defRPr>
-            </a:lvl6pPr>
-            <a:lvl7pPr marL="2971800" indent="-228600" algn="l" defTabSz="914400" rtl="0" eaLnBrk="1" latinLnBrk="0" hangingPunct="1">
-              <a:lnSpc>
-                <a:spcPct val="90000"/>
-              </a:lnSpc>
-              <a:spcBef>
-                <a:spcPts val="500"/>
-              </a:spcBef>
-              <a:buFont typeface="Arial" panose="020B0604020202020204" pitchFamily="34" charset="0"/>
-              <a:buChar char="•"/>
-              <a:defRPr sz="1800" kern="1200">
-                <a:solidFill>
-                  <a:schemeClr val="tx1"/>
-                </a:solidFill>
-                <a:latin typeface="+mn-lt"/>
-                <a:ea typeface="+mn-ea"/>
-                <a:cs typeface="+mn-cs"/>
-              </a:defRPr>
-            </a:lvl7pPr>
-            <a:lvl8pPr marL="3429000" indent="-228600" algn="l" defTabSz="914400" rtl="0" eaLnBrk="1" latinLnBrk="0" hangingPunct="1">
-              <a:lnSpc>
-                <a:spcPct val="90000"/>
-              </a:lnSpc>
-              <a:spcBef>
-                <a:spcPts val="500"/>
-              </a:spcBef>
-              <a:buFont typeface="Arial" panose="020B0604020202020204" pitchFamily="34" charset="0"/>
-              <a:buChar char="•"/>
-              <a:defRPr sz="1800" kern="1200">
-                <a:solidFill>
-                  <a:schemeClr val="tx1"/>
-                </a:solidFill>
-                <a:latin typeface="+mn-lt"/>
-                <a:ea typeface="+mn-ea"/>
-                <a:cs typeface="+mn-cs"/>
-              </a:defRPr>
-            </a:lvl8pPr>
-            <a:lvl9pPr marL="3886200" indent="-228600" algn="l" defTabSz="914400" rtl="0" eaLnBrk="1" latinLnBrk="0" hangingPunct="1">
-              <a:lnSpc>
-                <a:spcPct val="90000"/>
-              </a:lnSpc>
-              <a:spcBef>
-                <a:spcPts val="500"/>
-              </a:spcBef>
-              <a:buFont typeface="Arial" panose="020B0604020202020204" pitchFamily="34" charset="0"/>
-              <a:buChar char="•"/>
-              <a:defRPr sz="1800" kern="1200">
-                <a:solidFill>
-                  <a:schemeClr val="tx1"/>
-                </a:solidFill>
-                <a:latin typeface="+mn-lt"/>
-                <a:ea typeface="+mn-ea"/>
-                <a:cs typeface="+mn-cs"/>
-              </a:defRPr>
-            </a:lvl9pPr>
-          </a:lstStyle>
-          <a:p>
-            <a:r>
-              <a:rPr lang="en-US" altLang="zh-CN"/>
-              <a:t>Textures</a:t>
-            </a:r>
-            <a:endParaRPr lang="en-US" altLang="zh-CN"/>
-          </a:p>
-          <a:p>
-            <a:pPr lvl="1"/>
-            <a:r>
-              <a:rPr lang="zh-CN" altLang="en-US"/>
-              <a:t>https://polyhaven.com/zh/textures</a:t>
-            </a:r>
-            <a:endParaRPr lang="zh-CN" altLang="en-US"/>
-          </a:p>
-          <a:p>
-            <a:pPr lvl="2"/>
-            <a:r>
-              <a:rPr lang="en-US" altLang="zh-CN"/>
-              <a:t>total: 432</a:t>
-            </a:r>
-            <a:endParaRPr lang="en-US" altLang="zh-CN"/>
-          </a:p>
-          <a:p>
-            <a:pPr lvl="1"/>
-            <a:r>
-              <a:rPr lang="en-US" altLang="zh-CN"/>
-              <a:t>https://cc0-textures.com/</a:t>
-            </a:r>
-            <a:endParaRPr lang="en-US" altLang="zh-CN"/>
-          </a:p>
-          <a:p>
-            <a:pPr lvl="2"/>
-            <a:r>
-              <a:rPr lang="en-US" altLang="zh-CN"/>
-              <a:t>total: 3314</a:t>
-            </a:r>
-            <a:endParaRPr lang="en-US" altLang="zh-CN"/>
-          </a:p>
-        </p:txBody>
-      </p:sp>
+      </p:pic>
+      <p:pic>
+        <p:nvPicPr>
+          <p:cNvPr id="6" name="图片 5" descr="FangZhengShuSongJianTi-1"/>
+          <p:cNvPicPr>
+            <a:picLocks noChangeAspect="1"/>
+          </p:cNvPicPr>
+          <p:nvPr/>
+        </p:nvPicPr>
+        <p:blipFill>
+          <a:blip r:embed="rId2"/>
+          <a:stretch>
+            <a:fillRect/>
+          </a:stretch>
+        </p:blipFill>
+        <p:spPr>
+          <a:xfrm>
+            <a:off x="8470265" y="4008755"/>
+            <a:ext cx="1381125" cy="276225"/>
+          </a:xfrm>
+          <a:prstGeom prst="rect">
+            <a:avLst/>
+          </a:prstGeom>
+        </p:spPr>
+      </p:pic>
+      <p:pic>
+        <p:nvPicPr>
+          <p:cNvPr id="7" name="图片 6" descr="FangZhengFangSongJianTi-1"/>
+          <p:cNvPicPr>
+            <a:picLocks noChangeAspect="1"/>
+          </p:cNvPicPr>
+          <p:nvPr/>
+        </p:nvPicPr>
+        <p:blipFill>
+          <a:blip r:embed="rId3"/>
+          <a:stretch>
+            <a:fillRect/>
+          </a:stretch>
+        </p:blipFill>
+        <p:spPr>
+          <a:xfrm>
+            <a:off x="8787765" y="4326255"/>
+            <a:ext cx="1381125" cy="276225"/>
+          </a:xfrm>
+          <a:prstGeom prst="rect">
+            <a:avLst/>
+          </a:prstGeom>
+        </p:spPr>
+      </p:pic>
+      <p:pic>
+        <p:nvPicPr>
+          <p:cNvPr id="8" name="图片 7" descr="FangZhengHeiTiJianTi-1"/>
+          <p:cNvPicPr>
+            <a:picLocks noChangeAspect="1"/>
+          </p:cNvPicPr>
+          <p:nvPr/>
+        </p:nvPicPr>
+        <p:blipFill>
+          <a:blip r:embed="rId4"/>
+          <a:stretch>
+            <a:fillRect/>
+          </a:stretch>
+        </p:blipFill>
+        <p:spPr>
+          <a:xfrm>
+            <a:off x="9105265" y="4643755"/>
+            <a:ext cx="1381125" cy="276225"/>
+          </a:xfrm>
+          <a:prstGeom prst="rect">
+            <a:avLst/>
+          </a:prstGeom>
+        </p:spPr>
+      </p:pic>
+      <p:pic>
+        <p:nvPicPr>
+          <p:cNvPr id="9" name="图片 8" descr="FangZhengKaiTiJianTi-1"/>
+          <p:cNvPicPr>
+            <a:picLocks noChangeAspect="1"/>
+          </p:cNvPicPr>
+          <p:nvPr/>
+        </p:nvPicPr>
+        <p:blipFill>
+          <a:blip r:embed="rId5"/>
+          <a:stretch>
+            <a:fillRect/>
+          </a:stretch>
+        </p:blipFill>
+        <p:spPr>
+          <a:xfrm>
+            <a:off x="9422765" y="4966335"/>
+            <a:ext cx="1381125" cy="266700"/>
+          </a:xfrm>
+          <a:prstGeom prst="rect">
+            <a:avLst/>
+          </a:prstGeom>
+        </p:spPr>
+      </p:pic>
     </p:spTree>
     <p:custDataLst>
-      <p:tags r:id="rId1"/>
+      <p:tags r:id="rId6"/>
     </p:custDataLst>
   </p:cSld>
   <p:clrMapOvr>
@@ -5257,7 +5782,9 @@
 
 <file path=ppt/tags/tag13.xml><?xml version="1.0" encoding="utf-8"?>
 <p:tagLst xmlns:p="http://schemas.openxmlformats.org/presentationml/2006/main">
-  <p:tag name="KSO_WM_BEAUTIFY_FLAG" val=""/>
+  <p:tag name="KSO_WM_BEAUTIFY_FLAG" val="#wm#"/>
+  <p:tag name="KSO_WM_TEMPLATE_CATEGORY" val="custom"/>
+  <p:tag name="KSO_WM_TEMPLATE_INDEX" val="160402"/>
 </p:tagLst>
 </file>
 
@@ -5271,13 +5798,27 @@
 
 <file path=ppt/tags/tag15.xml><?xml version="1.0" encoding="utf-8"?>
 <p:tagLst xmlns:p="http://schemas.openxmlformats.org/presentationml/2006/main">
+  <p:tag name="KSO_WM_BEAUTIFY_FLAG" val=""/>
+</p:tagLst>
+</file>
+
+<file path=ppt/tags/tag16.xml><?xml version="1.0" encoding="utf-8"?>
+<p:tagLst xmlns:p="http://schemas.openxmlformats.org/presentationml/2006/main">
   <p:tag name="KSO_WM_BEAUTIFY_FLAG" val="#wm#"/>
   <p:tag name="KSO_WM_TEMPLATE_CATEGORY" val="custom"/>
   <p:tag name="KSO_WM_TEMPLATE_INDEX" val="160402"/>
 </p:tagLst>
 </file>
 
-<file path=ppt/tags/tag16.xml><?xml version="1.0" encoding="utf-8"?>
+<file path=ppt/tags/tag17.xml><?xml version="1.0" encoding="utf-8"?>
+<p:tagLst xmlns:p="http://schemas.openxmlformats.org/presentationml/2006/main">
+  <p:tag name="KSO_WM_BEAUTIFY_FLAG" val="#wm#"/>
+  <p:tag name="KSO_WM_TEMPLATE_CATEGORY" val="custom"/>
+  <p:tag name="KSO_WM_TEMPLATE_INDEX" val="160402"/>
+</p:tagLst>
+</file>
+
+<file path=ppt/tags/tag18.xml><?xml version="1.0" encoding="utf-8"?>
 <p:tagLst xmlns:p="http://schemas.openxmlformats.org/presentationml/2006/main">
   <p:tag name="COMMONDATA" val="eyJoZGlkIjoiYjRhZjQ5NWVmZmQxNmM3NmNkNDYxNWRmNzNmMjA1ZDAifQ=="/>
   <p:tag name="KSO_WPP_MARK_KEY" val="86549eee-af69-4bb6-8267-8160481c168e"/>

--- a/Misc/Resources-Notes.pptx
+++ b/Misc/Resources-Notes.pptx
@@ -4006,7 +4006,9 @@
           </a:xfrm>
         </p:spPr>
         <p:txBody>
-          <a:bodyPr/>
+          <a:bodyPr>
+            <a:normAutofit fontScale="60000"/>
+          </a:bodyPr>
           <a:p>
             <a:r>
               <a:rPr lang="en-US" altLang="zh-CN"/>
@@ -4027,6 +4029,128 @@
             <a:r>
               <a:rPr lang="en-US" altLang="zh-CN"/>
               <a:t>total: 286</a:t>
+            </a:r>
+            <a:endParaRPr lang="en-US" altLang="zh-CN"/>
+          </a:p>
+          <a:p>
+            <a:pPr lvl="1"/>
+            <a:r>
+              <a:rPr lang="en-US" altLang="zh-CN"/>
+              <a:t>https://www.turbosquid.com/</a:t>
+            </a:r>
+            <a:endParaRPr lang="en-US" altLang="zh-CN"/>
+          </a:p>
+          <a:p>
+            <a:pPr lvl="1"/>
+            <a:r>
+              <a:rPr lang="en-US" altLang="zh-CN" sz="2000">
+                <a:sym typeface="+mn-ea"/>
+              </a:rPr>
+              <a:t>https://www.si.edu/openaccess</a:t>
+            </a:r>
+            <a:endParaRPr lang="en-US" altLang="zh-CN" sz="2000"/>
+          </a:p>
+          <a:p>
+            <a:pPr lvl="2"/>
+            <a:r>
+              <a:rPr lang="en-US" altLang="zh-CN" sz="2000">
+                <a:sym typeface="+mn-ea"/>
+              </a:rPr>
+              <a:t>can download, share, and reuse millions of the Smithsonian’s images—right now, without asking</a:t>
+            </a:r>
+            <a:endParaRPr lang="en-US" altLang="zh-CN" sz="2000">
+              <a:sym typeface="+mn-ea"/>
+            </a:endParaRPr>
+          </a:p>
+          <a:p>
+            <a:pPr lvl="2"/>
+            <a:r>
+              <a:rPr lang="en-US" altLang="zh-CN"/>
+              <a:t>including 3d models from museums</a:t>
+            </a:r>
+            <a:endParaRPr lang="en-US" altLang="zh-CN"/>
+          </a:p>
+          <a:p>
+            <a:pPr lvl="0"/>
+            <a:r>
+              <a:rPr lang="en-US" altLang="zh-CN"/>
+              <a:t>Models, materials</a:t>
+            </a:r>
+            <a:endParaRPr lang="en-US" altLang="zh-CN"/>
+          </a:p>
+          <a:p>
+            <a:pPr lvl="1"/>
+            <a:r>
+              <a:rPr lang="en-US" altLang="zh-CN"/>
+              <a:t>https://ambientcg.com/</a:t>
+            </a:r>
+            <a:endParaRPr lang="en-US" altLang="zh-CN"/>
+          </a:p>
+          <a:p>
+            <a:pPr lvl="2"/>
+            <a:r>
+              <a:rPr lang="en-US" altLang="zh-CN"/>
+              <a:t>CC0 license</a:t>
+            </a:r>
+            <a:endParaRPr lang="en-US" altLang="zh-CN"/>
+          </a:p>
+          <a:p>
+            <a:pPr lvl="0"/>
+            <a:r>
+              <a:rPr lang="en-US" altLang="zh-CN"/>
+              <a:t>Blende</a:t>
+            </a:r>
+            <a:r>
+              <a:rPr lang="en-US" altLang="zh-CN"/>
+              <a:t>r Resources</a:t>
+            </a:r>
+            <a:endParaRPr lang="en-US" altLang="zh-CN"/>
+          </a:p>
+          <a:p>
+            <a:pPr lvl="1"/>
+            <a:r>
+              <a:rPr lang="en-US" altLang="zh-CN"/>
+              <a:t>City Scapes</a:t>
+            </a:r>
+            <a:endParaRPr lang="en-US" altLang="zh-CN"/>
+          </a:p>
+          <a:p>
+            <a:pPr lvl="2"/>
+            <a:r>
+              <a:rPr lang="en-US" altLang="zh-CN"/>
+              <a:t>https://www.blenderx.cn/1445.html</a:t>
+            </a:r>
+            <a:endParaRPr lang="en-US" altLang="zh-CN"/>
+          </a:p>
+          <a:p>
+            <a:pPr lvl="1"/>
+            <a:r>
+              <a:rPr lang="en-US" altLang="zh-CN"/>
+              <a:t>Plant Library</a:t>
+            </a:r>
+            <a:endParaRPr lang="en-US" altLang="zh-CN"/>
+          </a:p>
+          <a:p>
+            <a:pPr lvl="2"/>
+            <a:r>
+              <a:rPr lang="en-US" altLang="zh-CN"/>
+              <a:t>https://www.blenderx.cn/4365.html</a:t>
+            </a:r>
+            <a:endParaRPr lang="en-US" altLang="zh-CN"/>
+          </a:p>
+          <a:p>
+            <a:pPr lvl="1"/>
+            <a:r>
+              <a:rPr lang="en-US" altLang="zh-CN"/>
+              <a:t>Interior</a:t>
+            </a:r>
+            <a:endParaRPr lang="en-US" altLang="zh-CN"/>
+          </a:p>
+          <a:p>
+            <a:pPr lvl="2"/>
+            <a:r>
+              <a:rPr lang="en-US" altLang="zh-CN"/>
+              <a:t>https://www.blenderx.cn/4243.html</a:t>
             </a:r>
             <a:endParaRPr lang="en-US" altLang="zh-CN"/>
           </a:p>
@@ -4256,6 +4380,14 @@
             </a:r>
             <a:endParaRPr lang="en-US" altLang="zh-CN"/>
           </a:p>
+          <a:p>
+            <a:pPr lvl="1"/>
+            <a:r>
+              <a:rPr lang="en-US" altLang="zh-CN"/>
+              <a:t>https://freepbr.com/</a:t>
+            </a:r>
+            <a:endParaRPr lang="en-US" altLang="zh-CN"/>
+          </a:p>
         </p:txBody>
       </p:sp>
     </p:spTree>
@@ -4660,9 +4792,16 @@
             <p:ph idx="1"/>
           </p:nvPr>
         </p:nvSpPr>
-        <p:spPr/>
-        <p:txBody>
-          <a:bodyPr/>
+        <p:spPr>
+          <a:xfrm>
+            <a:off x="838200" y="1211580"/>
+            <a:ext cx="5057140" cy="4549140"/>
+          </a:xfrm>
+        </p:spPr>
+        <p:txBody>
+          <a:bodyPr>
+            <a:normAutofit fontScale="70000"/>
+          </a:bodyPr>
           <a:p>
             <a:r>
               <a:rPr lang="en-US" altLang="zh-CN"/>
@@ -4703,6 +4842,38 @@
             <a:endParaRPr lang="en-US" altLang="zh-CN"/>
           </a:p>
           <a:p>
+            <a:pPr lvl="1"/>
+            <a:r>
+              <a:rPr lang="en-US" altLang="zh-CN"/>
+              <a:t>https://stocksnap.io/</a:t>
+            </a:r>
+            <a:endParaRPr lang="en-US" altLang="zh-CN"/>
+          </a:p>
+          <a:p>
+            <a:pPr lvl="1"/>
+            <a:r>
+              <a:rPr lang="en-US" altLang="zh-CN"/>
+              <a:t>https://www.si.edu/openaccess</a:t>
+            </a:r>
+            <a:endParaRPr lang="en-US" altLang="zh-CN"/>
+          </a:p>
+          <a:p>
+            <a:pPr lvl="2"/>
+            <a:r>
+              <a:rPr lang="en-US" altLang="zh-CN"/>
+              <a:t>can download, share, and reuse millions of the Smithsonian’s images—right now, without asking</a:t>
+            </a:r>
+            <a:endParaRPr lang="en-US" altLang="zh-CN"/>
+          </a:p>
+          <a:p>
+            <a:pPr lvl="2"/>
+            <a:r>
+              <a:rPr lang="en-US" altLang="zh-CN"/>
+              <a:t>5.1 million 2D and 3D digital items from across the Smithsonian’s 21 museums, nine research centers, libraries, archives, and the National Zoo.</a:t>
+            </a:r>
+            <a:endParaRPr lang="en-US" altLang="zh-CN"/>
+          </a:p>
+          <a:p>
             <a:pPr lvl="0"/>
             <a:r>
               <a:rPr lang="en-US" altLang="zh-CN"/>
@@ -4733,6 +4904,206 @@
               <a:t>attribution: &lt;a href="https://www.vecteezy.com/free-photos/360"&gt;360 Stock photos by Vecteezy&lt;/a&gt;</a:t>
             </a:r>
             <a:endParaRPr lang="en-US" altLang="zh-CN"/>
+          </a:p>
+        </p:txBody>
+      </p:sp>
+      <p:sp>
+        <p:nvSpPr>
+          <p:cNvPr id="4" name="内容占位符 2"/>
+          <p:cNvSpPr>
+            <a:spLocks noGrp="1"/>
+          </p:cNvSpPr>
+          <p:nvPr/>
+        </p:nvSpPr>
+        <p:spPr>
+          <a:xfrm>
+            <a:off x="6407150" y="1211580"/>
+            <a:ext cx="5057140" cy="4549140"/>
+          </a:xfrm>
+          <a:prstGeom prst="rect">
+            <a:avLst/>
+          </a:prstGeom>
+        </p:spPr>
+        <p:txBody>
+          <a:bodyPr vert="horz" lIns="91440" tIns="45720" rIns="91440" bIns="45720" rtlCol="0"/>
+          <a:lstStyle>
+            <a:lvl1pPr marL="342900" indent="-342900" algn="l" defTabSz="914400" rtl="0" eaLnBrk="1" latinLnBrk="0" hangingPunct="1">
+              <a:lnSpc>
+                <a:spcPct val="90000"/>
+              </a:lnSpc>
+              <a:spcBef>
+                <a:spcPts val="1000"/>
+              </a:spcBef>
+              <a:buFont typeface="黑体" panose="02010609060101010101" pitchFamily="49" charset="-122"/>
+              <a:buChar char="〉"/>
+              <a:defRPr sz="2400" kern="1200">
+                <a:solidFill>
+                  <a:schemeClr val="tx1"/>
+                </a:solidFill>
+                <a:latin typeface="+mn-lt"/>
+                <a:ea typeface="+mn-ea"/>
+                <a:cs typeface="+mn-cs"/>
+              </a:defRPr>
+            </a:lvl1pPr>
+            <a:lvl2pPr marL="800100" indent="-342900" algn="l" defTabSz="914400" rtl="0" eaLnBrk="1" latinLnBrk="0" hangingPunct="1">
+              <a:lnSpc>
+                <a:spcPct val="90000"/>
+              </a:lnSpc>
+              <a:spcBef>
+                <a:spcPts val="500"/>
+              </a:spcBef>
+              <a:buFont typeface="Arial" panose="020B0604020202020204" pitchFamily="34" charset="0"/>
+              <a:buChar char="•"/>
+              <a:defRPr sz="2000" kern="1200">
+                <a:solidFill>
+                  <a:schemeClr val="tx1"/>
+                </a:solidFill>
+                <a:latin typeface="+mn-lt"/>
+                <a:ea typeface="+mn-ea"/>
+                <a:cs typeface="+mn-cs"/>
+              </a:defRPr>
+            </a:lvl2pPr>
+            <a:lvl3pPr marL="1257300" indent="-342900" algn="l" defTabSz="914400" rtl="0" eaLnBrk="1" latinLnBrk="0" hangingPunct="1">
+              <a:lnSpc>
+                <a:spcPct val="90000"/>
+              </a:lnSpc>
+              <a:spcBef>
+                <a:spcPts val="500"/>
+              </a:spcBef>
+              <a:buFont typeface="Arial" panose="020B0604020202020204" pitchFamily="34" charset="0"/>
+              <a:buChar char="•"/>
+              <a:defRPr sz="1800" kern="1200">
+                <a:solidFill>
+                  <a:schemeClr val="tx1"/>
+                </a:solidFill>
+                <a:latin typeface="+mn-lt"/>
+                <a:ea typeface="+mn-ea"/>
+                <a:cs typeface="+mn-cs"/>
+              </a:defRPr>
+            </a:lvl3pPr>
+            <a:lvl4pPr marL="1657350" indent="-285750" algn="l" defTabSz="914400" rtl="0" eaLnBrk="1" latinLnBrk="0" hangingPunct="1">
+              <a:lnSpc>
+                <a:spcPct val="90000"/>
+              </a:lnSpc>
+              <a:spcBef>
+                <a:spcPts val="500"/>
+              </a:spcBef>
+              <a:buFont typeface="Arial" panose="020B0604020202020204" pitchFamily="34" charset="0"/>
+              <a:buChar char="•"/>
+              <a:defRPr sz="1800" kern="1200">
+                <a:solidFill>
+                  <a:schemeClr val="tx1"/>
+                </a:solidFill>
+                <a:latin typeface="+mn-lt"/>
+                <a:ea typeface="+mn-ea"/>
+                <a:cs typeface="+mn-cs"/>
+              </a:defRPr>
+            </a:lvl4pPr>
+            <a:lvl5pPr marL="2114550" indent="-285750" algn="l" defTabSz="914400" rtl="0" eaLnBrk="1" latinLnBrk="0" hangingPunct="1">
+              <a:lnSpc>
+                <a:spcPct val="90000"/>
+              </a:lnSpc>
+              <a:spcBef>
+                <a:spcPts val="500"/>
+              </a:spcBef>
+              <a:buFont typeface="Arial" panose="020B0604020202020204" pitchFamily="34" charset="0"/>
+              <a:buChar char="•"/>
+              <a:defRPr sz="1800" kern="1200">
+                <a:solidFill>
+                  <a:schemeClr val="tx1"/>
+                </a:solidFill>
+                <a:latin typeface="+mn-lt"/>
+                <a:ea typeface="+mn-ea"/>
+                <a:cs typeface="+mn-cs"/>
+              </a:defRPr>
+            </a:lvl5pPr>
+            <a:lvl6pPr marL="2514600" indent="-228600" algn="l" defTabSz="914400" rtl="0" eaLnBrk="1" latinLnBrk="0" hangingPunct="1">
+              <a:lnSpc>
+                <a:spcPct val="90000"/>
+              </a:lnSpc>
+              <a:spcBef>
+                <a:spcPts val="500"/>
+              </a:spcBef>
+              <a:buFont typeface="Arial" panose="020B0604020202020204" pitchFamily="34" charset="0"/>
+              <a:buChar char="•"/>
+              <a:defRPr sz="1800" kern="1200">
+                <a:solidFill>
+                  <a:schemeClr val="tx1"/>
+                </a:solidFill>
+                <a:latin typeface="+mn-lt"/>
+                <a:ea typeface="+mn-ea"/>
+                <a:cs typeface="+mn-cs"/>
+              </a:defRPr>
+            </a:lvl6pPr>
+            <a:lvl7pPr marL="2971800" indent="-228600" algn="l" defTabSz="914400" rtl="0" eaLnBrk="1" latinLnBrk="0" hangingPunct="1">
+              <a:lnSpc>
+                <a:spcPct val="90000"/>
+              </a:lnSpc>
+              <a:spcBef>
+                <a:spcPts val="500"/>
+              </a:spcBef>
+              <a:buFont typeface="Arial" panose="020B0604020202020204" pitchFamily="34" charset="0"/>
+              <a:buChar char="•"/>
+              <a:defRPr sz="1800" kern="1200">
+                <a:solidFill>
+                  <a:schemeClr val="tx1"/>
+                </a:solidFill>
+                <a:latin typeface="+mn-lt"/>
+                <a:ea typeface="+mn-ea"/>
+                <a:cs typeface="+mn-cs"/>
+              </a:defRPr>
+            </a:lvl7pPr>
+            <a:lvl8pPr marL="3429000" indent="-228600" algn="l" defTabSz="914400" rtl="0" eaLnBrk="1" latinLnBrk="0" hangingPunct="1">
+              <a:lnSpc>
+                <a:spcPct val="90000"/>
+              </a:lnSpc>
+              <a:spcBef>
+                <a:spcPts val="500"/>
+              </a:spcBef>
+              <a:buFont typeface="Arial" panose="020B0604020202020204" pitchFamily="34" charset="0"/>
+              <a:buChar char="•"/>
+              <a:defRPr sz="1800" kern="1200">
+                <a:solidFill>
+                  <a:schemeClr val="tx1"/>
+                </a:solidFill>
+                <a:latin typeface="+mn-lt"/>
+                <a:ea typeface="+mn-ea"/>
+                <a:cs typeface="+mn-cs"/>
+              </a:defRPr>
+            </a:lvl8pPr>
+            <a:lvl9pPr marL="3886200" indent="-228600" algn="l" defTabSz="914400" rtl="0" eaLnBrk="1" latinLnBrk="0" hangingPunct="1">
+              <a:lnSpc>
+                <a:spcPct val="90000"/>
+              </a:lnSpc>
+              <a:spcBef>
+                <a:spcPts val="500"/>
+              </a:spcBef>
+              <a:buFont typeface="Arial" panose="020B0604020202020204" pitchFamily="34" charset="0"/>
+              <a:buChar char="•"/>
+              <a:defRPr sz="1800" kern="1200">
+                <a:solidFill>
+                  <a:schemeClr val="tx1"/>
+                </a:solidFill>
+                <a:latin typeface="+mn-lt"/>
+                <a:ea typeface="+mn-ea"/>
+                <a:cs typeface="+mn-cs"/>
+              </a:defRPr>
+            </a:lvl9pPr>
+          </a:lstStyle>
+          <a:p>
+            <a:r>
+              <a:rPr lang="en-US" altLang="zh-CN" sz="1800"/>
+              <a:t>SVG</a:t>
+            </a:r>
+            <a:endParaRPr lang="en-US" altLang="zh-CN" sz="1800"/>
+          </a:p>
+          <a:p>
+            <a:pPr lvl="1"/>
+            <a:r>
+              <a:rPr lang="en-US" altLang="zh-CN" sz="1600"/>
+              <a:t>https://www.svgrepo.com</a:t>
+            </a:r>
+            <a:endParaRPr lang="en-US" altLang="zh-CN" sz="1600"/>
           </a:p>
         </p:txBody>
       </p:sp>
